--- a/static/downloads/income-streams/SuperAdPro-4-Income-Streams-EN.pptx
+++ b/static/downloads/income-streams/SuperAdPro-4-Income-Streams-EN.pptx
@@ -2237,7 +2237,7 @@
                 <a:ea typeface="Arial" pitchFamily="34" charset="-122"/>
                 <a:cs typeface="Arial" pitchFamily="34" charset="-120"/>
               </a:rPr>
-              <a:t>Up to $103,976</a:t>
+              <a:t>Theoretical max: $103,976*</a:t>
             </a:r>
             <a:endParaRPr lang="en-US" sz="850" dirty="0"/>
           </a:p>
@@ -2399,7 +2399,7 @@
                 <a:ea typeface="Arial" pitchFamily="34" charset="-122"/>
                 <a:cs typeface="Arial" pitchFamily="34" charset="-120"/>
               </a:rPr>
-              <a:t>Unlimited</a:t>
+              <a:t>Variable</a:t>
             </a:r>
             <a:endParaRPr lang="en-US" sz="850" dirty="0"/>
           </a:p>
@@ -6564,7 +6564,7 @@
                 <a:ea typeface="Arial" pitchFamily="34" charset="-122"/>
                 <a:cs typeface="Arial" pitchFamily="34" charset="-120"/>
               </a:rPr>
-              <a:t>Fill all 64 positions, earn a bonus. Grid resets — unlimited recurring income.</a:t>
+              <a:t>Fill all 64 positions, earn a bonus. Grid resets — recurring income while members stay active.</a:t>
             </a:r>
             <a:endParaRPr lang="en-US" sz="850" dirty="0"/>
           </a:p>
@@ -6630,7 +6630,7 @@
                 <a:ea typeface="Arial" pitchFamily="34" charset="-122"/>
                 <a:cs typeface="Arial" pitchFamily="34" charset="-120"/>
               </a:rPr>
-              <a:t>Up to $103,976</a:t>
+              <a:t>Theoretical max: $103,976*</a:t>
             </a:r>
             <a:pPr algn="ctr" indent="0" marL="0">
               <a:buNone/>
@@ -12992,7 +12992,7 @@
                 <a:ea typeface="Arial" pitchFamily="34" charset="-122"/>
                 <a:cs typeface="Arial" pitchFamily="34" charset="-120"/>
               </a:rPr>
-              <a:t>Unlimited</a:t>
+              <a:t>Variable</a:t>
             </a:r>
             <a:pPr algn="ctr" indent="0" marL="0">
               <a:buNone/>
